--- a/06_relazioni_e_parametri/Slides/07_confronto-ansatz.pptx
+++ b/06_relazioni_e_parametri/Slides/07_confronto-ansatz.pptx
@@ -744,8 +744,8 @@
         </p:nvSpPr>
         <p:spPr>
           <a:xfrm>
-            <a:off x="640080" y="1737360"/>
-            <a:ext cx="5120640" cy="2377440"/>
+            <a:off x="640080" y="1615226"/>
+            <a:ext cx="4772165" cy="1965960"/>
           </a:xfrm>
           <a:prstGeom prst="roundRect">
             <a:avLst>
@@ -767,248 +767,14 @@
       </p:sp>
       <p:sp>
         <p:nvSpPr>
-          <p:cNvPr id="5" name="Text 3"/>
-          <p:cNvSpPr txBox="1"/>
-          <p:nvPr/>
-        </p:nvSpPr>
-        <p:spPr>
-          <a:xfrm>
-            <a:off x="960120" y="1874520"/>
-            <a:ext cx="4480560" cy="292608"/>
-          </a:xfrm>
-          <a:prstGeom prst="rect">
-            <a:avLst/>
-          </a:prstGeom>
-          <a:noFill/>
-          <a:ln/>
-        </p:spPr>
-        <p:txBody>
-          <a:bodyPr wrap="square" lIns="0" tIns="0" rIns="0" bIns="0" rtlCol="0" anchor="ctr"/>
-          <a:lstStyle/>
-          <a:p>
-            <a:pPr marL="0" indent="0">
-              <a:buNone/>
-            </a:pPr>
-            <a:r>
-              <a:rPr lang="en-US" sz="1500" b="1" dirty="0">
-                <a:solidFill>
-                  <a:srgbClr val="173A5E"/>
-                </a:solidFill>
-                <a:latin typeface="Calibri" pitchFamily="34" charset="0"/>
-                <a:ea typeface="Calibri" pitchFamily="34" charset="-122"/>
-                <a:cs typeface="Calibri" pitchFamily="34" charset="-120"/>
-              </a:rPr>
-              <a:t>P1 — punto di lavoro principale del dimero</a:t>
-            </a:r>
-            <a:endParaRPr lang="en-US" sz="1500" dirty="0"/>
-          </a:p>
-        </p:txBody>
-      </p:sp>
-      <p:sp>
-        <p:nvSpPr>
-          <p:cNvPr id="6" name="Text 4"/>
-          <p:cNvSpPr txBox="1"/>
-          <p:nvPr/>
-        </p:nvSpPr>
-        <p:spPr>
-          <a:xfrm>
-            <a:off x="960120" y="2185416"/>
-            <a:ext cx="4480560" cy="274320"/>
-          </a:xfrm>
-          <a:prstGeom prst="rect">
-            <a:avLst/>
-          </a:prstGeom>
-          <a:noFill/>
-          <a:ln/>
-        </p:spPr>
-        <p:txBody>
-          <a:bodyPr wrap="square" lIns="0" tIns="0" rIns="0" bIns="0" rtlCol="0" anchor="ctr"/>
-          <a:lstStyle/>
-          <a:p>
-            <a:pPr marL="0" indent="0">
-              <a:buNone/>
-            </a:pPr>
-            <a:r>
-              <a:rPr lang="en-US" sz="1300" b="1" dirty="0">
-                <a:solidFill>
-                  <a:srgbClr val="16233A"/>
-                </a:solidFill>
-                <a:latin typeface="Calibri" pitchFamily="34" charset="0"/>
-                <a:ea typeface="Calibri" pitchFamily="34" charset="-122"/>
-                <a:cs typeface="Calibri" pitchFamily="34" charset="-120"/>
-              </a:rPr>
-              <a:t>b/J = 0.35,  D/J = 0.80</a:t>
-            </a:r>
-            <a:endParaRPr lang="en-US" sz="1300" dirty="0"/>
-          </a:p>
-        </p:txBody>
-      </p:sp>
-      <p:sp>
-        <p:nvSpPr>
-          <p:cNvPr id="7" name="Text 5"/>
-          <p:cNvSpPr txBox="1"/>
-          <p:nvPr/>
-        </p:nvSpPr>
-        <p:spPr>
-          <a:xfrm>
-            <a:off x="960120" y="2487168"/>
-            <a:ext cx="4480560" cy="457200"/>
-          </a:xfrm>
-          <a:prstGeom prst="rect">
-            <a:avLst/>
-          </a:prstGeom>
-          <a:noFill/>
-          <a:ln/>
-        </p:spPr>
-        <p:txBody>
-          <a:bodyPr wrap="square" lIns="0" tIns="0" rIns="0" bIns="0" rtlCol="0" anchor="ctr"/>
-          <a:lstStyle/>
-          <a:p>
-            <a:pPr marL="0" indent="0">
-              <a:buNone/>
-            </a:pPr>
-            <a:r>
-              <a:rPr lang="en-US" sz="1150" i="1" dirty="0">
-                <a:solidFill>
-                  <a:srgbClr val="5B6B84"/>
-                </a:solidFill>
-                <a:latin typeface="Calibri" pitchFamily="34" charset="0"/>
-                <a:ea typeface="Calibri" pitchFamily="34" charset="-122"/>
-                <a:cs typeface="Calibri" pitchFamily="34" charset="-120"/>
-              </a:rPr>
-              <a:t>Il DM ha un'unica forma possibile nel dimero (un solo legame) — a differenza del trimero, dove servono più opzioni</a:t>
-            </a:r>
-            <a:endParaRPr lang="en-US" sz="1150" dirty="0"/>
-          </a:p>
-        </p:txBody>
-      </p:sp>
-      <p:sp>
-        <p:nvSpPr>
-          <p:cNvPr id="8" name="Text 6"/>
-          <p:cNvSpPr txBox="1"/>
-          <p:nvPr/>
-        </p:nvSpPr>
-        <p:spPr>
-          <a:xfrm>
-            <a:off x="960120" y="3017520"/>
-            <a:ext cx="4480560" cy="310896"/>
-          </a:xfrm>
-          <a:prstGeom prst="rect">
-            <a:avLst/>
-          </a:prstGeom>
-          <a:noFill/>
-          <a:ln/>
-        </p:spPr>
-        <p:txBody>
-          <a:bodyPr wrap="square" lIns="0" tIns="0" rIns="0" bIns="0" rtlCol="0" anchor="ctr"/>
-          <a:lstStyle/>
-          <a:p>
-            <a:pPr marL="0" indent="0">
-              <a:buNone/>
-            </a:pPr>
-            <a:r>
-              <a:rPr lang="en-US" sz="1350" dirty="0">
-                <a:solidFill>
-                  <a:srgbClr val="16233A"/>
-                </a:solidFill>
-                <a:latin typeface="Calibri" pitchFamily="34" charset="0"/>
-                <a:ea typeface="Calibri" pitchFamily="34" charset="-122"/>
-                <a:cs typeface="Calibri" pitchFamily="34" charset="-120"/>
-              </a:rPr>
-              <a:t>HA (6 par.):  F = 1.000000</a:t>
-            </a:r>
-            <a:endParaRPr lang="en-US" sz="1350" dirty="0"/>
-          </a:p>
-        </p:txBody>
-      </p:sp>
-      <p:sp>
-        <p:nvSpPr>
-          <p:cNvPr id="9" name="Text 7"/>
-          <p:cNvSpPr txBox="1"/>
-          <p:nvPr/>
-        </p:nvSpPr>
-        <p:spPr>
-          <a:xfrm>
-            <a:off x="960120" y="3364992"/>
-            <a:ext cx="4480560" cy="310896"/>
-          </a:xfrm>
-          <a:prstGeom prst="rect">
-            <a:avLst/>
-          </a:prstGeom>
-          <a:noFill/>
-          <a:ln/>
-        </p:spPr>
-        <p:txBody>
-          <a:bodyPr wrap="square" lIns="0" tIns="0" rIns="0" bIns="0" rtlCol="0" anchor="ctr"/>
-          <a:lstStyle/>
-          <a:p>
-            <a:pPr marL="0" indent="0">
-              <a:buNone/>
-            </a:pPr>
-            <a:r>
-              <a:rPr lang="en-US" sz="1350" dirty="0">
-                <a:solidFill>
-                  <a:srgbClr val="16233A"/>
-                </a:solidFill>
-                <a:latin typeface="Calibri" pitchFamily="34" charset="0"/>
-                <a:ea typeface="Calibri" pitchFamily="34" charset="-122"/>
-                <a:cs typeface="Calibri" pitchFamily="34" charset="-120"/>
-              </a:rPr>
-              <a:t>PMA base (1 par.):  F = 0.9402</a:t>
-            </a:r>
-            <a:endParaRPr lang="en-US" sz="1350" dirty="0"/>
-          </a:p>
-        </p:txBody>
-      </p:sp>
-      <p:sp>
-        <p:nvSpPr>
-          <p:cNvPr id="10" name="Text 8"/>
-          <p:cNvSpPr txBox="1"/>
-          <p:nvPr/>
-        </p:nvSpPr>
-        <p:spPr>
-          <a:xfrm>
-            <a:off x="960120" y="3712464"/>
-            <a:ext cx="4480560" cy="310896"/>
-          </a:xfrm>
-          <a:prstGeom prst="rect">
-            <a:avLst/>
-          </a:prstGeom>
-          <a:noFill/>
-          <a:ln/>
-        </p:spPr>
-        <p:txBody>
-          <a:bodyPr wrap="square" lIns="0" tIns="0" rIns="0" bIns="0" rtlCol="0" anchor="ctr"/>
-          <a:lstStyle/>
-          <a:p>
-            <a:pPr marL="0" indent="0">
-              <a:buNone/>
-            </a:pPr>
-            <a:r>
-              <a:rPr lang="en-US" sz="1350" dirty="0">
-                <a:solidFill>
-                  <a:srgbClr val="16233A"/>
-                </a:solidFill>
-                <a:latin typeface="Calibri" pitchFamily="34" charset="0"/>
-                <a:ea typeface="Calibri" pitchFamily="34" charset="-122"/>
-                <a:cs typeface="Calibri" pitchFamily="34" charset="-120"/>
-              </a:rPr>
-              <a:t>PMA esteso (3 par.):  F = 1.000000 (12 cifre) — 2 CNOT</a:t>
-            </a:r>
-            <a:endParaRPr lang="en-US" sz="1350" dirty="0"/>
-          </a:p>
-        </p:txBody>
-      </p:sp>
-      <p:sp>
-        <p:nvSpPr>
           <p:cNvPr id="11" name="Shape 9"/>
           <p:cNvSpPr/>
           <p:nvPr/>
         </p:nvSpPr>
         <p:spPr>
           <a:xfrm>
-            <a:off x="640080" y="4297680"/>
-            <a:ext cx="5120640" cy="1508760"/>
+            <a:off x="640080" y="4232138"/>
+            <a:ext cx="4800600" cy="1508760"/>
           </a:xfrm>
           <a:prstGeom prst="roundRect">
             <a:avLst>
@@ -1036,8 +802,8 @@
         </p:nvSpPr>
         <p:spPr>
           <a:xfrm>
-            <a:off x="960120" y="4443984"/>
-            <a:ext cx="4480560" cy="329184"/>
+            <a:off x="960120" y="4378442"/>
+            <a:ext cx="4200525" cy="329184"/>
           </a:xfrm>
           <a:prstGeom prst="rect">
             <a:avLst/>
@@ -1075,8 +841,8 @@
         </p:nvSpPr>
         <p:spPr>
           <a:xfrm>
-            <a:off x="960120" y="4864608"/>
-            <a:ext cx="4480560" cy="310896"/>
+            <a:off x="960120" y="4799066"/>
+            <a:ext cx="4200525" cy="310896"/>
           </a:xfrm>
           <a:prstGeom prst="rect">
             <a:avLst/>
@@ -1114,8 +880,8 @@
         </p:nvSpPr>
         <p:spPr>
           <a:xfrm>
-            <a:off x="960120" y="5248656"/>
-            <a:ext cx="4480560" cy="457200"/>
+            <a:off x="960120" y="5183114"/>
+            <a:ext cx="4200525" cy="457200"/>
           </a:xfrm>
           <a:prstGeom prst="rect">
             <a:avLst/>
@@ -1139,7 +905,7 @@
                 <a:ea typeface="Calibri" pitchFamily="34" charset="-122"/>
                 <a:cs typeface="Calibri" pitchFamily="34" charset="-120"/>
               </a:rPr>
-              <a:t>conferma: la degradazione dipende anche da D, non solo dalla vicinanza all'incrocio</a:t>
+              <a:t>la degradazione dipende anche da D, non solo dalla vicinanza all'incrocio</a:t>
             </a:r>
             <a:endParaRPr lang="en-US" sz="1150" dirty="0"/>
           </a:p>
@@ -1153,7 +919,7 @@
         </p:nvSpPr>
         <p:spPr>
           <a:xfrm>
-            <a:off x="640080" y="5989320"/>
+            <a:off x="626225" y="6269717"/>
             <a:ext cx="10911535" cy="502920"/>
           </a:xfrm>
           <a:prstGeom prst="rect">
@@ -1200,14 +966,635 @@
         </p:blipFill>
         <p:spPr>
           <a:xfrm>
-            <a:off x="5969117" y="1965960"/>
-            <a:ext cx="5508517" cy="3383280"/>
+            <a:off x="6615182" y="3686758"/>
+            <a:ext cx="4402315" cy="2703861"/>
           </a:xfrm>
           <a:prstGeom prst="rect">
             <a:avLst/>
           </a:prstGeom>
         </p:spPr>
       </p:pic>
+      <p:sp>
+        <p:nvSpPr>
+          <p:cNvPr id="17" name="Shape 9">
+            <a:extLst>
+              <a:ext uri="{FF2B5EF4-FFF2-40B4-BE49-F238E27FC236}">
+                <a16:creationId xmlns:a16="http://schemas.microsoft.com/office/drawing/2014/main" id="{488AC17E-E47C-B563-1AFB-E9465463B42C}"/>
+              </a:ext>
+            </a:extLst>
+          </p:cNvPr>
+          <p:cNvSpPr/>
+          <p:nvPr/>
+        </p:nvSpPr>
+        <p:spPr>
+          <a:xfrm>
+            <a:off x="6416040" y="1611069"/>
+            <a:ext cx="4800600" cy="1970117"/>
+          </a:xfrm>
+          <a:prstGeom prst="roundRect">
+            <a:avLst>
+              <a:gd name="adj" fmla="val 6061"/>
+            </a:avLst>
+          </a:prstGeom>
+          <a:solidFill>
+            <a:srgbClr val="F2F5F9"/>
+          </a:solidFill>
+          <a:ln/>
+        </p:spPr>
+        <p:txBody>
+          <a:bodyPr/>
+          <a:lstStyle/>
+          <a:p>
+            <a:endParaRPr lang="en-US"/>
+          </a:p>
+        </p:txBody>
+      </p:sp>
+      <p:sp>
+        <p:nvSpPr>
+          <p:cNvPr id="18" name="Text 10">
+            <a:extLst>
+              <a:ext uri="{FF2B5EF4-FFF2-40B4-BE49-F238E27FC236}">
+                <a16:creationId xmlns:a16="http://schemas.microsoft.com/office/drawing/2014/main" id="{DD0AA3B3-009A-1CDA-FC09-2F110BD262B8}"/>
+              </a:ext>
+            </a:extLst>
+          </p:cNvPr>
+          <p:cNvSpPr txBox="1"/>
+          <p:nvPr/>
+        </p:nvSpPr>
+        <p:spPr>
+          <a:xfrm>
+            <a:off x="932411" y="1710760"/>
+            <a:ext cx="4480560" cy="329184"/>
+          </a:xfrm>
+          <a:prstGeom prst="rect">
+            <a:avLst/>
+          </a:prstGeom>
+          <a:noFill/>
+          <a:ln/>
+        </p:spPr>
+        <p:txBody>
+          <a:bodyPr wrap="square" lIns="0" tIns="0" rIns="0" bIns="0" rtlCol="0" anchor="ctr"/>
+          <a:lstStyle/>
+          <a:p>
+            <a:pPr marL="0" indent="0">
+              <a:buNone/>
+            </a:pPr>
+            <a:r>
+              <a:rPr lang="en-US" sz="1500" b="1" dirty="0">
+                <a:solidFill>
+                  <a:srgbClr val="173A5E"/>
+                </a:solidFill>
+                <a:latin typeface="Calibri" pitchFamily="34" charset="0"/>
+                <a:ea typeface="Calibri" pitchFamily="34" charset="-122"/>
+                <a:cs typeface="Calibri" pitchFamily="34" charset="-120"/>
+              </a:rPr>
+              <a:t>Punto di </a:t>
+            </a:r>
+            <a:r>
+              <a:rPr lang="en-US" sz="1500" b="1" dirty="0" err="1">
+                <a:solidFill>
+                  <a:srgbClr val="173A5E"/>
+                </a:solidFill>
+                <a:latin typeface="Calibri" pitchFamily="34" charset="0"/>
+                <a:ea typeface="Calibri" pitchFamily="34" charset="-122"/>
+                <a:cs typeface="Calibri" pitchFamily="34" charset="-120"/>
+              </a:rPr>
+              <a:t>incrocio</a:t>
+            </a:r>
+            <a:endParaRPr lang="en-US" sz="1500" dirty="0"/>
+          </a:p>
+        </p:txBody>
+      </p:sp>
+      <p:sp>
+        <p:nvSpPr>
+          <p:cNvPr id="20" name="Text 12">
+            <a:extLst>
+              <a:ext uri="{FF2B5EF4-FFF2-40B4-BE49-F238E27FC236}">
+                <a16:creationId xmlns:a16="http://schemas.microsoft.com/office/drawing/2014/main" id="{DE642882-4920-C1DD-C760-857BEC43D5FF}"/>
+              </a:ext>
+            </a:extLst>
+          </p:cNvPr>
+          <p:cNvSpPr txBox="1"/>
+          <p:nvPr/>
+        </p:nvSpPr>
+        <p:spPr>
+          <a:xfrm>
+            <a:off x="4234756" y="2609715"/>
+            <a:ext cx="1177490" cy="457200"/>
+          </a:xfrm>
+          <a:prstGeom prst="rect">
+            <a:avLst/>
+          </a:prstGeom>
+          <a:noFill/>
+          <a:ln/>
+        </p:spPr>
+        <p:txBody>
+          <a:bodyPr wrap="square" lIns="0" tIns="0" rIns="0" bIns="0" rtlCol="0" anchor="ctr"/>
+          <a:lstStyle/>
+          <a:p>
+            <a:pPr marL="0" indent="0">
+              <a:buNone/>
+            </a:pPr>
+            <a:r>
+              <a:rPr lang="en-US" sz="1150" i="1" dirty="0" err="1">
+                <a:solidFill>
+                  <a:srgbClr val="5B6B84"/>
+                </a:solidFill>
+                <a:latin typeface="Calibri" pitchFamily="34" charset="0"/>
+                <a:ea typeface="Calibri" pitchFamily="34" charset="-122"/>
+                <a:cs typeface="Calibri" pitchFamily="34" charset="-120"/>
+              </a:rPr>
+              <a:t>Minimo</a:t>
+            </a:r>
+            <a:r>
+              <a:rPr lang="en-US" sz="1150" i="1" dirty="0">
+                <a:solidFill>
+                  <a:srgbClr val="5B6B84"/>
+                </a:solidFill>
+                <a:latin typeface="Calibri" pitchFamily="34" charset="0"/>
+                <a:ea typeface="Calibri" pitchFamily="34" charset="-122"/>
+                <a:cs typeface="Calibri" pitchFamily="34" charset="-120"/>
+              </a:rPr>
+              <a:t> </a:t>
+            </a:r>
+            <a:r>
+              <a:rPr lang="en-US" sz="1150" i="1" dirty="0" err="1">
+                <a:solidFill>
+                  <a:srgbClr val="5B6B84"/>
+                </a:solidFill>
+                <a:latin typeface="Calibri" pitchFamily="34" charset="0"/>
+                <a:ea typeface="Calibri" pitchFamily="34" charset="-122"/>
+                <a:cs typeface="Calibri" pitchFamily="34" charset="-120"/>
+              </a:rPr>
+              <a:t>assoluto</a:t>
+            </a:r>
+            <a:endParaRPr lang="en-US" sz="1150" dirty="0"/>
+          </a:p>
+        </p:txBody>
+      </p:sp>
+      <p:sp>
+        <p:nvSpPr>
+          <p:cNvPr id="25" name="Text 4">
+            <a:extLst>
+              <a:ext uri="{FF2B5EF4-FFF2-40B4-BE49-F238E27FC236}">
+                <a16:creationId xmlns:a16="http://schemas.microsoft.com/office/drawing/2014/main" id="{9C1EF0B7-F5C7-5CAB-D386-063FB5455466}"/>
+              </a:ext>
+            </a:extLst>
+          </p:cNvPr>
+          <p:cNvSpPr txBox="1"/>
+          <p:nvPr/>
+        </p:nvSpPr>
+        <p:spPr>
+          <a:xfrm>
+            <a:off x="931685" y="2030099"/>
+            <a:ext cx="4480560" cy="274320"/>
+          </a:xfrm>
+          <a:prstGeom prst="rect">
+            <a:avLst/>
+          </a:prstGeom>
+          <a:noFill/>
+          <a:ln/>
+        </p:spPr>
+        <p:txBody>
+          <a:bodyPr wrap="square" lIns="0" tIns="0" rIns="0" bIns="0" rtlCol="0" anchor="ctr"/>
+          <a:lstStyle/>
+          <a:p>
+            <a:pPr marL="0" indent="0">
+              <a:buNone/>
+            </a:pPr>
+            <a:r>
+              <a:rPr lang="en-US" sz="1300" b="1" dirty="0">
+                <a:solidFill>
+                  <a:srgbClr val="16233A"/>
+                </a:solidFill>
+                <a:latin typeface="Calibri" pitchFamily="34" charset="0"/>
+                <a:ea typeface="Calibri" pitchFamily="34" charset="-122"/>
+                <a:cs typeface="Calibri" pitchFamily="34" charset="-120"/>
+              </a:rPr>
+              <a:t>b/J = 0.2,  D/J = 0.2</a:t>
+            </a:r>
+            <a:endParaRPr lang="en-US" sz="1300" dirty="0"/>
+          </a:p>
+        </p:txBody>
+      </p:sp>
+      <p:sp>
+        <p:nvSpPr>
+          <p:cNvPr id="26" name="Text 6">
+            <a:extLst>
+              <a:ext uri="{FF2B5EF4-FFF2-40B4-BE49-F238E27FC236}">
+                <a16:creationId xmlns:a16="http://schemas.microsoft.com/office/drawing/2014/main" id="{589AEB8D-7E20-4EE9-583F-AAF655D143C6}"/>
+              </a:ext>
+            </a:extLst>
+          </p:cNvPr>
+          <p:cNvSpPr txBox="1"/>
+          <p:nvPr/>
+        </p:nvSpPr>
+        <p:spPr>
+          <a:xfrm>
+            <a:off x="932411" y="2442758"/>
+            <a:ext cx="4480560" cy="310896"/>
+          </a:xfrm>
+          <a:prstGeom prst="rect">
+            <a:avLst/>
+          </a:prstGeom>
+          <a:noFill/>
+          <a:ln/>
+        </p:spPr>
+        <p:txBody>
+          <a:bodyPr wrap="square" lIns="0" tIns="0" rIns="0" bIns="0" rtlCol="0" anchor="ctr"/>
+          <a:lstStyle/>
+          <a:p>
+            <a:pPr marL="0" indent="0">
+              <a:buNone/>
+            </a:pPr>
+            <a:r>
+              <a:rPr lang="en-US" sz="1350" dirty="0">
+                <a:solidFill>
+                  <a:srgbClr val="16233A"/>
+                </a:solidFill>
+                <a:latin typeface="Calibri" pitchFamily="34" charset="0"/>
+                <a:ea typeface="Calibri" pitchFamily="34" charset="-122"/>
+                <a:cs typeface="Calibri" pitchFamily="34" charset="-120"/>
+              </a:rPr>
+              <a:t>HA (6 par.):  F = 1.000000</a:t>
+            </a:r>
+            <a:endParaRPr lang="en-US" sz="1350" dirty="0"/>
+          </a:p>
+        </p:txBody>
+      </p:sp>
+      <p:sp>
+        <p:nvSpPr>
+          <p:cNvPr id="27" name="Text 7">
+            <a:extLst>
+              <a:ext uri="{FF2B5EF4-FFF2-40B4-BE49-F238E27FC236}">
+                <a16:creationId xmlns:a16="http://schemas.microsoft.com/office/drawing/2014/main" id="{2CBC856D-E0D5-332F-2C6A-5028E5F70E25}"/>
+              </a:ext>
+            </a:extLst>
+          </p:cNvPr>
+          <p:cNvSpPr txBox="1"/>
+          <p:nvPr/>
+        </p:nvSpPr>
+        <p:spPr>
+          <a:xfrm>
+            <a:off x="932411" y="2790230"/>
+            <a:ext cx="3147752" cy="310896"/>
+          </a:xfrm>
+          <a:prstGeom prst="rect">
+            <a:avLst/>
+          </a:prstGeom>
+          <a:noFill/>
+          <a:ln/>
+        </p:spPr>
+        <p:txBody>
+          <a:bodyPr wrap="square" lIns="0" tIns="0" rIns="0" bIns="0" rtlCol="0" anchor="ctr"/>
+          <a:lstStyle/>
+          <a:p>
+            <a:pPr marL="0" indent="0">
+              <a:buNone/>
+            </a:pPr>
+            <a:r>
+              <a:rPr lang="en-US" sz="1350" dirty="0">
+                <a:solidFill>
+                  <a:srgbClr val="16233A"/>
+                </a:solidFill>
+                <a:latin typeface="Calibri" pitchFamily="34" charset="0"/>
+                <a:ea typeface="Calibri" pitchFamily="34" charset="-122"/>
+                <a:cs typeface="Calibri" pitchFamily="34" charset="-120"/>
+              </a:rPr>
+              <a:t>PMA base (1 par.):  F = 0.491</a:t>
+            </a:r>
+            <a:endParaRPr lang="en-US" sz="1350" dirty="0"/>
+          </a:p>
+        </p:txBody>
+      </p:sp>
+      <p:sp>
+        <p:nvSpPr>
+          <p:cNvPr id="28" name="Text 8">
+            <a:extLst>
+              <a:ext uri="{FF2B5EF4-FFF2-40B4-BE49-F238E27FC236}">
+                <a16:creationId xmlns:a16="http://schemas.microsoft.com/office/drawing/2014/main" id="{7916E202-C893-D83E-E888-CD095B062221}"/>
+              </a:ext>
+            </a:extLst>
+          </p:cNvPr>
+          <p:cNvSpPr txBox="1"/>
+          <p:nvPr/>
+        </p:nvSpPr>
+        <p:spPr>
+          <a:xfrm>
+            <a:off x="932411" y="3138534"/>
+            <a:ext cx="4480560" cy="310896"/>
+          </a:xfrm>
+          <a:prstGeom prst="rect">
+            <a:avLst/>
+          </a:prstGeom>
+          <a:noFill/>
+          <a:ln/>
+        </p:spPr>
+        <p:txBody>
+          <a:bodyPr wrap="square" lIns="0" tIns="0" rIns="0" bIns="0" rtlCol="0" anchor="ctr"/>
+          <a:lstStyle/>
+          <a:p>
+            <a:pPr marL="0" indent="0">
+              <a:buNone/>
+            </a:pPr>
+            <a:r>
+              <a:rPr lang="en-US" sz="1350" dirty="0">
+                <a:solidFill>
+                  <a:srgbClr val="16233A"/>
+                </a:solidFill>
+                <a:latin typeface="Calibri" pitchFamily="34" charset="0"/>
+                <a:ea typeface="Calibri" pitchFamily="34" charset="-122"/>
+                <a:cs typeface="Calibri" pitchFamily="34" charset="-120"/>
+              </a:rPr>
+              <a:t>PMA esteso (3 par.):  F = 1.000000 (12 </a:t>
+            </a:r>
+            <a:r>
+              <a:rPr lang="en-US" sz="1350" dirty="0" err="1">
+                <a:solidFill>
+                  <a:srgbClr val="16233A"/>
+                </a:solidFill>
+                <a:latin typeface="Calibri" pitchFamily="34" charset="0"/>
+                <a:ea typeface="Calibri" pitchFamily="34" charset="-122"/>
+                <a:cs typeface="Calibri" pitchFamily="34" charset="-120"/>
+              </a:rPr>
+              <a:t>cifre</a:t>
+            </a:r>
+            <a:r>
+              <a:rPr lang="en-US" sz="1350" dirty="0">
+                <a:solidFill>
+                  <a:srgbClr val="16233A"/>
+                </a:solidFill>
+                <a:latin typeface="Calibri" pitchFamily="34" charset="0"/>
+                <a:ea typeface="Calibri" pitchFamily="34" charset="-122"/>
+                <a:cs typeface="Calibri" pitchFamily="34" charset="-120"/>
+              </a:rPr>
+              <a:t>)</a:t>
+            </a:r>
+            <a:endParaRPr lang="en-US" sz="1350" dirty="0"/>
+          </a:p>
+        </p:txBody>
+      </p:sp>
+      <p:sp>
+        <p:nvSpPr>
+          <p:cNvPr id="29" name="Text 3"/>
+          <p:cNvSpPr txBox="1"/>
+          <p:nvPr/>
+        </p:nvSpPr>
+        <p:spPr>
+          <a:xfrm>
+            <a:off x="6779029" y="1720798"/>
+            <a:ext cx="4480560" cy="292608"/>
+          </a:xfrm>
+          <a:prstGeom prst="rect">
+            <a:avLst/>
+          </a:prstGeom>
+          <a:noFill/>
+          <a:ln/>
+        </p:spPr>
+        <p:txBody>
+          <a:bodyPr wrap="square" lIns="0" tIns="0" rIns="0" bIns="0" rtlCol="0" anchor="ctr"/>
+          <a:lstStyle/>
+          <a:p>
+            <a:pPr marL="0" indent="0">
+              <a:buNone/>
+            </a:pPr>
+            <a:r>
+              <a:rPr lang="en-US" sz="1500" b="1" dirty="0">
+                <a:solidFill>
+                  <a:srgbClr val="173A5E"/>
+                </a:solidFill>
+                <a:latin typeface="Calibri" pitchFamily="34" charset="0"/>
+                <a:ea typeface="Calibri" pitchFamily="34" charset="-122"/>
+                <a:cs typeface="Calibri" pitchFamily="34" charset="-120"/>
+              </a:rPr>
+              <a:t>P1 — punto di </a:t>
+            </a:r>
+            <a:r>
+              <a:rPr lang="en-US" sz="1500" b="1" dirty="0" err="1">
+                <a:solidFill>
+                  <a:srgbClr val="173A5E"/>
+                </a:solidFill>
+                <a:latin typeface="Calibri" pitchFamily="34" charset="0"/>
+                <a:ea typeface="Calibri" pitchFamily="34" charset="-122"/>
+                <a:cs typeface="Calibri" pitchFamily="34" charset="-120"/>
+              </a:rPr>
+              <a:t>lavoro</a:t>
+            </a:r>
+            <a:r>
+              <a:rPr lang="en-US" sz="1500" b="1" dirty="0">
+                <a:solidFill>
+                  <a:srgbClr val="173A5E"/>
+                </a:solidFill>
+                <a:latin typeface="Calibri" pitchFamily="34" charset="0"/>
+                <a:ea typeface="Calibri" pitchFamily="34" charset="-122"/>
+                <a:cs typeface="Calibri" pitchFamily="34" charset="-120"/>
+              </a:rPr>
+              <a:t> </a:t>
+            </a:r>
+            <a:r>
+              <a:rPr lang="en-US" sz="1500" b="1" dirty="0" err="1">
+                <a:solidFill>
+                  <a:srgbClr val="173A5E"/>
+                </a:solidFill>
+                <a:latin typeface="Calibri" pitchFamily="34" charset="0"/>
+                <a:ea typeface="Calibri" pitchFamily="34" charset="-122"/>
+                <a:cs typeface="Calibri" pitchFamily="34" charset="-120"/>
+              </a:rPr>
+              <a:t>scelto</a:t>
+            </a:r>
+            <a:r>
+              <a:rPr lang="en-US" sz="1500" b="1" dirty="0">
+                <a:solidFill>
+                  <a:srgbClr val="173A5E"/>
+                </a:solidFill>
+                <a:latin typeface="Calibri" pitchFamily="34" charset="0"/>
+                <a:ea typeface="Calibri" pitchFamily="34" charset="-122"/>
+                <a:cs typeface="Calibri" pitchFamily="34" charset="-120"/>
+              </a:rPr>
+              <a:t> del dimero</a:t>
+            </a:r>
+            <a:endParaRPr lang="en-US" sz="1500" dirty="0"/>
+          </a:p>
+        </p:txBody>
+      </p:sp>
+      <p:sp>
+        <p:nvSpPr>
+          <p:cNvPr id="30" name="Text 4"/>
+          <p:cNvSpPr txBox="1"/>
+          <p:nvPr/>
+        </p:nvSpPr>
+        <p:spPr>
+          <a:xfrm>
+            <a:off x="6779029" y="2031694"/>
+            <a:ext cx="4480560" cy="274320"/>
+          </a:xfrm>
+          <a:prstGeom prst="rect">
+            <a:avLst/>
+          </a:prstGeom>
+          <a:noFill/>
+          <a:ln/>
+        </p:spPr>
+        <p:txBody>
+          <a:bodyPr wrap="square" lIns="0" tIns="0" rIns="0" bIns="0" rtlCol="0" anchor="ctr"/>
+          <a:lstStyle/>
+          <a:p>
+            <a:pPr marL="0" indent="0">
+              <a:buNone/>
+            </a:pPr>
+            <a:r>
+              <a:rPr lang="en-US" sz="1300" b="1" dirty="0">
+                <a:solidFill>
+                  <a:srgbClr val="16233A"/>
+                </a:solidFill>
+                <a:latin typeface="Calibri" pitchFamily="34" charset="0"/>
+                <a:ea typeface="Calibri" pitchFamily="34" charset="-122"/>
+                <a:cs typeface="Calibri" pitchFamily="34" charset="-120"/>
+              </a:rPr>
+              <a:t>b/J = 0.35,  D/J = 0.80</a:t>
+            </a:r>
+            <a:endParaRPr lang="en-US" sz="1300" dirty="0"/>
+          </a:p>
+        </p:txBody>
+      </p:sp>
+      <p:sp>
+        <p:nvSpPr>
+          <p:cNvPr id="31" name="Text 6"/>
+          <p:cNvSpPr txBox="1"/>
+          <p:nvPr/>
+        </p:nvSpPr>
+        <p:spPr>
+          <a:xfrm>
+            <a:off x="6779029" y="2447331"/>
+            <a:ext cx="4480560" cy="310896"/>
+          </a:xfrm>
+          <a:prstGeom prst="rect">
+            <a:avLst/>
+          </a:prstGeom>
+          <a:noFill/>
+          <a:ln/>
+        </p:spPr>
+        <p:txBody>
+          <a:bodyPr wrap="square" lIns="0" tIns="0" rIns="0" bIns="0" rtlCol="0" anchor="ctr"/>
+          <a:lstStyle/>
+          <a:p>
+            <a:pPr marL="0" indent="0">
+              <a:buNone/>
+            </a:pPr>
+            <a:r>
+              <a:rPr lang="en-US" sz="1350" dirty="0">
+                <a:solidFill>
+                  <a:srgbClr val="16233A"/>
+                </a:solidFill>
+                <a:latin typeface="Calibri" pitchFamily="34" charset="0"/>
+                <a:ea typeface="Calibri" pitchFamily="34" charset="-122"/>
+                <a:cs typeface="Calibri" pitchFamily="34" charset="-120"/>
+              </a:rPr>
+              <a:t>HA (6 par.):  F = 1.000000</a:t>
+            </a:r>
+            <a:endParaRPr lang="en-US" sz="1350" dirty="0"/>
+          </a:p>
+        </p:txBody>
+      </p:sp>
+      <p:sp>
+        <p:nvSpPr>
+          <p:cNvPr id="32" name="Text 7"/>
+          <p:cNvSpPr txBox="1"/>
+          <p:nvPr/>
+        </p:nvSpPr>
+        <p:spPr>
+          <a:xfrm>
+            <a:off x="6779029" y="2794803"/>
+            <a:ext cx="4480560" cy="310896"/>
+          </a:xfrm>
+          <a:prstGeom prst="rect">
+            <a:avLst/>
+          </a:prstGeom>
+          <a:noFill/>
+          <a:ln/>
+        </p:spPr>
+        <p:txBody>
+          <a:bodyPr wrap="square" lIns="0" tIns="0" rIns="0" bIns="0" rtlCol="0" anchor="ctr"/>
+          <a:lstStyle/>
+          <a:p>
+            <a:pPr marL="0" indent="0">
+              <a:buNone/>
+            </a:pPr>
+            <a:r>
+              <a:rPr lang="en-US" sz="1350" dirty="0">
+                <a:solidFill>
+                  <a:srgbClr val="16233A"/>
+                </a:solidFill>
+                <a:latin typeface="Calibri" pitchFamily="34" charset="0"/>
+                <a:ea typeface="Calibri" pitchFamily="34" charset="-122"/>
+                <a:cs typeface="Calibri" pitchFamily="34" charset="-120"/>
+              </a:rPr>
+              <a:t>PMA base (1 par.):  F = 0.9402</a:t>
+            </a:r>
+            <a:endParaRPr lang="en-US" sz="1350" dirty="0"/>
+          </a:p>
+        </p:txBody>
+      </p:sp>
+      <p:sp>
+        <p:nvSpPr>
+          <p:cNvPr id="33" name="Text 8"/>
+          <p:cNvSpPr txBox="1"/>
+          <p:nvPr/>
+        </p:nvSpPr>
+        <p:spPr>
+          <a:xfrm>
+            <a:off x="6779029" y="3142275"/>
+            <a:ext cx="4480560" cy="310896"/>
+          </a:xfrm>
+          <a:prstGeom prst="rect">
+            <a:avLst/>
+          </a:prstGeom>
+          <a:noFill/>
+          <a:ln/>
+        </p:spPr>
+        <p:txBody>
+          <a:bodyPr wrap="square" lIns="0" tIns="0" rIns="0" bIns="0" rtlCol="0" anchor="ctr"/>
+          <a:lstStyle/>
+          <a:p>
+            <a:pPr marL="0" indent="0">
+              <a:buNone/>
+            </a:pPr>
+            <a:r>
+              <a:rPr lang="en-US" sz="1350" dirty="0">
+                <a:solidFill>
+                  <a:srgbClr val="16233A"/>
+                </a:solidFill>
+                <a:latin typeface="Calibri" pitchFamily="34" charset="0"/>
+                <a:ea typeface="Calibri" pitchFamily="34" charset="-122"/>
+                <a:cs typeface="Calibri" pitchFamily="34" charset="-120"/>
+              </a:rPr>
+              <a:t>PMA esteso (3 par.):  F = 1.000000 (12 </a:t>
+            </a:r>
+            <a:r>
+              <a:rPr lang="en-US" sz="1350" dirty="0" err="1">
+                <a:solidFill>
+                  <a:srgbClr val="16233A"/>
+                </a:solidFill>
+                <a:latin typeface="Calibri" pitchFamily="34" charset="0"/>
+                <a:ea typeface="Calibri" pitchFamily="34" charset="-122"/>
+                <a:cs typeface="Calibri" pitchFamily="34" charset="-120"/>
+              </a:rPr>
+              <a:t>cifre</a:t>
+            </a:r>
+            <a:r>
+              <a:rPr lang="en-US" sz="1350" dirty="0">
+                <a:solidFill>
+                  <a:srgbClr val="16233A"/>
+                </a:solidFill>
+                <a:latin typeface="Calibri" pitchFamily="34" charset="0"/>
+                <a:ea typeface="Calibri" pitchFamily="34" charset="-122"/>
+                <a:cs typeface="Calibri" pitchFamily="34" charset="-120"/>
+              </a:rPr>
+              <a:t>)</a:t>
+            </a:r>
+            <a:endParaRPr lang="en-US" sz="1350" dirty="0"/>
+          </a:p>
+        </p:txBody>
+      </p:sp>
     </p:spTree>
   </p:cSld>
   <p:clrMapOvr>
@@ -1216,1139 +1603,6 @@
   <p:transition spd="med">
     <p:fade/>
   </p:transition>
-  <p:timing>
-    <p:tnLst>
-      <p:par>
-        <p:cTn id="1" dur="indefinite" restart="never" nodeType="tmRoot">
-          <p:childTnLst>
-            <p:seq concurrent="1" nextAc="seek">
-              <p:cTn id="2" dur="indefinite" nodeType="mainSeq">
-                <p:childTnLst>
-                  <p:par>
-                    <p:cTn id="3" fill="hold">
-                      <p:stCondLst>
-                        <p:cond delay="indefinite"/>
-                      </p:stCondLst>
-                      <p:childTnLst>
-                        <p:par>
-                          <p:cTn id="4" fill="hold">
-                            <p:stCondLst>
-                              <p:cond delay="0"/>
-                            </p:stCondLst>
-                            <p:childTnLst>
-                              <p:par>
-                                <p:cTn id="5" presetID="42" presetClass="entr" presetSubtype="0" fill="hold" grpId="0" nodeType="clickEffect">
-                                  <p:stCondLst>
-                                    <p:cond delay="0"/>
-                                  </p:stCondLst>
-                                  <p:childTnLst>
-                                    <p:set>
-                                      <p:cBhvr>
-                                        <p:cTn id="6" dur="1" fill="hold">
-                                          <p:stCondLst>
-                                            <p:cond delay="0"/>
-                                          </p:stCondLst>
-                                        </p:cTn>
-                                        <p:tgtEl>
-                                          <p:spTgt spid="4"/>
-                                        </p:tgtEl>
-                                        <p:attrNameLst>
-                                          <p:attrName>style.visibility</p:attrName>
-                                        </p:attrNameLst>
-                                      </p:cBhvr>
-                                      <p:to>
-                                        <p:strVal val="visible"/>
-                                      </p:to>
-                                    </p:set>
-                                    <p:animEffect transition="in" filter="fade">
-                                      <p:cBhvr>
-                                        <p:cTn id="7" dur="1000"/>
-                                        <p:tgtEl>
-                                          <p:spTgt spid="4"/>
-                                        </p:tgtEl>
-                                      </p:cBhvr>
-                                    </p:animEffect>
-                                    <p:anim calcmode="lin" valueType="num">
-                                      <p:cBhvr>
-                                        <p:cTn id="8" dur="1000" fill="hold"/>
-                                        <p:tgtEl>
-                                          <p:spTgt spid="4"/>
-                                        </p:tgtEl>
-                                        <p:attrNameLst>
-                                          <p:attrName>ppt_x</p:attrName>
-                                        </p:attrNameLst>
-                                      </p:cBhvr>
-                                      <p:tavLst>
-                                        <p:tav tm="0">
-                                          <p:val>
-                                            <p:strVal val="#ppt_x"/>
-                                          </p:val>
-                                        </p:tav>
-                                        <p:tav tm="100000">
-                                          <p:val>
-                                            <p:strVal val="#ppt_x"/>
-                                          </p:val>
-                                        </p:tav>
-                                      </p:tavLst>
-                                    </p:anim>
-                                    <p:anim calcmode="lin" valueType="num">
-                                      <p:cBhvr>
-                                        <p:cTn id="9" dur="1000" fill="hold"/>
-                                        <p:tgtEl>
-                                          <p:spTgt spid="4"/>
-                                        </p:tgtEl>
-                                        <p:attrNameLst>
-                                          <p:attrName>ppt_y</p:attrName>
-                                        </p:attrNameLst>
-                                      </p:cBhvr>
-                                      <p:tavLst>
-                                        <p:tav tm="0">
-                                          <p:val>
-                                            <p:strVal val="#ppt_y+.1"/>
-                                          </p:val>
-                                        </p:tav>
-                                        <p:tav tm="100000">
-                                          <p:val>
-                                            <p:strVal val="#ppt_y"/>
-                                          </p:val>
-                                        </p:tav>
-                                      </p:tavLst>
-                                    </p:anim>
-                                  </p:childTnLst>
-                                </p:cTn>
-                              </p:par>
-                              <p:par>
-                                <p:cTn id="10" presetID="42" presetClass="entr" presetSubtype="0" fill="hold" grpId="0" nodeType="withEffect">
-                                  <p:stCondLst>
-                                    <p:cond delay="0"/>
-                                  </p:stCondLst>
-                                  <p:childTnLst>
-                                    <p:set>
-                                      <p:cBhvr>
-                                        <p:cTn id="11" dur="1" fill="hold">
-                                          <p:stCondLst>
-                                            <p:cond delay="0"/>
-                                          </p:stCondLst>
-                                        </p:cTn>
-                                        <p:tgtEl>
-                                          <p:spTgt spid="5"/>
-                                        </p:tgtEl>
-                                        <p:attrNameLst>
-                                          <p:attrName>style.visibility</p:attrName>
-                                        </p:attrNameLst>
-                                      </p:cBhvr>
-                                      <p:to>
-                                        <p:strVal val="visible"/>
-                                      </p:to>
-                                    </p:set>
-                                    <p:animEffect transition="in" filter="fade">
-                                      <p:cBhvr>
-                                        <p:cTn id="12" dur="1000"/>
-                                        <p:tgtEl>
-                                          <p:spTgt spid="5"/>
-                                        </p:tgtEl>
-                                      </p:cBhvr>
-                                    </p:animEffect>
-                                    <p:anim calcmode="lin" valueType="num">
-                                      <p:cBhvr>
-                                        <p:cTn id="13" dur="1000" fill="hold"/>
-                                        <p:tgtEl>
-                                          <p:spTgt spid="5"/>
-                                        </p:tgtEl>
-                                        <p:attrNameLst>
-                                          <p:attrName>ppt_x</p:attrName>
-                                        </p:attrNameLst>
-                                      </p:cBhvr>
-                                      <p:tavLst>
-                                        <p:tav tm="0">
-                                          <p:val>
-                                            <p:strVal val="#ppt_x"/>
-                                          </p:val>
-                                        </p:tav>
-                                        <p:tav tm="100000">
-                                          <p:val>
-                                            <p:strVal val="#ppt_x"/>
-                                          </p:val>
-                                        </p:tav>
-                                      </p:tavLst>
-                                    </p:anim>
-                                    <p:anim calcmode="lin" valueType="num">
-                                      <p:cBhvr>
-                                        <p:cTn id="14" dur="1000" fill="hold"/>
-                                        <p:tgtEl>
-                                          <p:spTgt spid="5"/>
-                                        </p:tgtEl>
-                                        <p:attrNameLst>
-                                          <p:attrName>ppt_y</p:attrName>
-                                        </p:attrNameLst>
-                                      </p:cBhvr>
-                                      <p:tavLst>
-                                        <p:tav tm="0">
-                                          <p:val>
-                                            <p:strVal val="#ppt_y+.1"/>
-                                          </p:val>
-                                        </p:tav>
-                                        <p:tav tm="100000">
-                                          <p:val>
-                                            <p:strVal val="#ppt_y"/>
-                                          </p:val>
-                                        </p:tav>
-                                      </p:tavLst>
-                                    </p:anim>
-                                  </p:childTnLst>
-                                </p:cTn>
-                              </p:par>
-                              <p:par>
-                                <p:cTn id="15" presetID="42" presetClass="entr" presetSubtype="0" fill="hold" grpId="0" nodeType="withEffect">
-                                  <p:stCondLst>
-                                    <p:cond delay="0"/>
-                                  </p:stCondLst>
-                                  <p:childTnLst>
-                                    <p:set>
-                                      <p:cBhvr>
-                                        <p:cTn id="16" dur="1" fill="hold">
-                                          <p:stCondLst>
-                                            <p:cond delay="0"/>
-                                          </p:stCondLst>
-                                        </p:cTn>
-                                        <p:tgtEl>
-                                          <p:spTgt spid="6"/>
-                                        </p:tgtEl>
-                                        <p:attrNameLst>
-                                          <p:attrName>style.visibility</p:attrName>
-                                        </p:attrNameLst>
-                                      </p:cBhvr>
-                                      <p:to>
-                                        <p:strVal val="visible"/>
-                                      </p:to>
-                                    </p:set>
-                                    <p:animEffect transition="in" filter="fade">
-                                      <p:cBhvr>
-                                        <p:cTn id="17" dur="1000"/>
-                                        <p:tgtEl>
-                                          <p:spTgt spid="6"/>
-                                        </p:tgtEl>
-                                      </p:cBhvr>
-                                    </p:animEffect>
-                                    <p:anim calcmode="lin" valueType="num">
-                                      <p:cBhvr>
-                                        <p:cTn id="18" dur="1000" fill="hold"/>
-                                        <p:tgtEl>
-                                          <p:spTgt spid="6"/>
-                                        </p:tgtEl>
-                                        <p:attrNameLst>
-                                          <p:attrName>ppt_x</p:attrName>
-                                        </p:attrNameLst>
-                                      </p:cBhvr>
-                                      <p:tavLst>
-                                        <p:tav tm="0">
-                                          <p:val>
-                                            <p:strVal val="#ppt_x"/>
-                                          </p:val>
-                                        </p:tav>
-                                        <p:tav tm="100000">
-                                          <p:val>
-                                            <p:strVal val="#ppt_x"/>
-                                          </p:val>
-                                        </p:tav>
-                                      </p:tavLst>
-                                    </p:anim>
-                                    <p:anim calcmode="lin" valueType="num">
-                                      <p:cBhvr>
-                                        <p:cTn id="19" dur="1000" fill="hold"/>
-                                        <p:tgtEl>
-                                          <p:spTgt spid="6"/>
-                                        </p:tgtEl>
-                                        <p:attrNameLst>
-                                          <p:attrName>ppt_y</p:attrName>
-                                        </p:attrNameLst>
-                                      </p:cBhvr>
-                                      <p:tavLst>
-                                        <p:tav tm="0">
-                                          <p:val>
-                                            <p:strVal val="#ppt_y+.1"/>
-                                          </p:val>
-                                        </p:tav>
-                                        <p:tav tm="100000">
-                                          <p:val>
-                                            <p:strVal val="#ppt_y"/>
-                                          </p:val>
-                                        </p:tav>
-                                      </p:tavLst>
-                                    </p:anim>
-                                  </p:childTnLst>
-                                </p:cTn>
-                              </p:par>
-                              <p:par>
-                                <p:cTn id="20" presetID="42" presetClass="entr" presetSubtype="0" fill="hold" grpId="0" nodeType="withEffect">
-                                  <p:stCondLst>
-                                    <p:cond delay="0"/>
-                                  </p:stCondLst>
-                                  <p:childTnLst>
-                                    <p:set>
-                                      <p:cBhvr>
-                                        <p:cTn id="21" dur="1" fill="hold">
-                                          <p:stCondLst>
-                                            <p:cond delay="0"/>
-                                          </p:stCondLst>
-                                        </p:cTn>
-                                        <p:tgtEl>
-                                          <p:spTgt spid="7"/>
-                                        </p:tgtEl>
-                                        <p:attrNameLst>
-                                          <p:attrName>style.visibility</p:attrName>
-                                        </p:attrNameLst>
-                                      </p:cBhvr>
-                                      <p:to>
-                                        <p:strVal val="visible"/>
-                                      </p:to>
-                                    </p:set>
-                                    <p:animEffect transition="in" filter="fade">
-                                      <p:cBhvr>
-                                        <p:cTn id="22" dur="1000"/>
-                                        <p:tgtEl>
-                                          <p:spTgt spid="7"/>
-                                        </p:tgtEl>
-                                      </p:cBhvr>
-                                    </p:animEffect>
-                                    <p:anim calcmode="lin" valueType="num">
-                                      <p:cBhvr>
-                                        <p:cTn id="23" dur="1000" fill="hold"/>
-                                        <p:tgtEl>
-                                          <p:spTgt spid="7"/>
-                                        </p:tgtEl>
-                                        <p:attrNameLst>
-                                          <p:attrName>ppt_x</p:attrName>
-                                        </p:attrNameLst>
-                                      </p:cBhvr>
-                                      <p:tavLst>
-                                        <p:tav tm="0">
-                                          <p:val>
-                                            <p:strVal val="#ppt_x"/>
-                                          </p:val>
-                                        </p:tav>
-                                        <p:tav tm="100000">
-                                          <p:val>
-                                            <p:strVal val="#ppt_x"/>
-                                          </p:val>
-                                        </p:tav>
-                                      </p:tavLst>
-                                    </p:anim>
-                                    <p:anim calcmode="lin" valueType="num">
-                                      <p:cBhvr>
-                                        <p:cTn id="24" dur="1000" fill="hold"/>
-                                        <p:tgtEl>
-                                          <p:spTgt spid="7"/>
-                                        </p:tgtEl>
-                                        <p:attrNameLst>
-                                          <p:attrName>ppt_y</p:attrName>
-                                        </p:attrNameLst>
-                                      </p:cBhvr>
-                                      <p:tavLst>
-                                        <p:tav tm="0">
-                                          <p:val>
-                                            <p:strVal val="#ppt_y+.1"/>
-                                          </p:val>
-                                        </p:tav>
-                                        <p:tav tm="100000">
-                                          <p:val>
-                                            <p:strVal val="#ppt_y"/>
-                                          </p:val>
-                                        </p:tav>
-                                      </p:tavLst>
-                                    </p:anim>
-                                  </p:childTnLst>
-                                </p:cTn>
-                              </p:par>
-                              <p:par>
-                                <p:cTn id="25" presetID="42" presetClass="entr" presetSubtype="0" fill="hold" grpId="0" nodeType="withEffect">
-                                  <p:stCondLst>
-                                    <p:cond delay="0"/>
-                                  </p:stCondLst>
-                                  <p:childTnLst>
-                                    <p:set>
-                                      <p:cBhvr>
-                                        <p:cTn id="26" dur="1" fill="hold">
-                                          <p:stCondLst>
-                                            <p:cond delay="0"/>
-                                          </p:stCondLst>
-                                        </p:cTn>
-                                        <p:tgtEl>
-                                          <p:spTgt spid="8"/>
-                                        </p:tgtEl>
-                                        <p:attrNameLst>
-                                          <p:attrName>style.visibility</p:attrName>
-                                        </p:attrNameLst>
-                                      </p:cBhvr>
-                                      <p:to>
-                                        <p:strVal val="visible"/>
-                                      </p:to>
-                                    </p:set>
-                                    <p:animEffect transition="in" filter="fade">
-                                      <p:cBhvr>
-                                        <p:cTn id="27" dur="1000"/>
-                                        <p:tgtEl>
-                                          <p:spTgt spid="8"/>
-                                        </p:tgtEl>
-                                      </p:cBhvr>
-                                    </p:animEffect>
-                                    <p:anim calcmode="lin" valueType="num">
-                                      <p:cBhvr>
-                                        <p:cTn id="28" dur="1000" fill="hold"/>
-                                        <p:tgtEl>
-                                          <p:spTgt spid="8"/>
-                                        </p:tgtEl>
-                                        <p:attrNameLst>
-                                          <p:attrName>ppt_x</p:attrName>
-                                        </p:attrNameLst>
-                                      </p:cBhvr>
-                                      <p:tavLst>
-                                        <p:tav tm="0">
-                                          <p:val>
-                                            <p:strVal val="#ppt_x"/>
-                                          </p:val>
-                                        </p:tav>
-                                        <p:tav tm="100000">
-                                          <p:val>
-                                            <p:strVal val="#ppt_x"/>
-                                          </p:val>
-                                        </p:tav>
-                                      </p:tavLst>
-                                    </p:anim>
-                                    <p:anim calcmode="lin" valueType="num">
-                                      <p:cBhvr>
-                                        <p:cTn id="29" dur="1000" fill="hold"/>
-                                        <p:tgtEl>
-                                          <p:spTgt spid="8"/>
-                                        </p:tgtEl>
-                                        <p:attrNameLst>
-                                          <p:attrName>ppt_y</p:attrName>
-                                        </p:attrNameLst>
-                                      </p:cBhvr>
-                                      <p:tavLst>
-                                        <p:tav tm="0">
-                                          <p:val>
-                                            <p:strVal val="#ppt_y+.1"/>
-                                          </p:val>
-                                        </p:tav>
-                                        <p:tav tm="100000">
-                                          <p:val>
-                                            <p:strVal val="#ppt_y"/>
-                                          </p:val>
-                                        </p:tav>
-                                      </p:tavLst>
-                                    </p:anim>
-                                  </p:childTnLst>
-                                </p:cTn>
-                              </p:par>
-                              <p:par>
-                                <p:cTn id="30" presetID="42" presetClass="entr" presetSubtype="0" fill="hold" grpId="0" nodeType="withEffect">
-                                  <p:stCondLst>
-                                    <p:cond delay="0"/>
-                                  </p:stCondLst>
-                                  <p:childTnLst>
-                                    <p:set>
-                                      <p:cBhvr>
-                                        <p:cTn id="31" dur="1" fill="hold">
-                                          <p:stCondLst>
-                                            <p:cond delay="0"/>
-                                          </p:stCondLst>
-                                        </p:cTn>
-                                        <p:tgtEl>
-                                          <p:spTgt spid="9"/>
-                                        </p:tgtEl>
-                                        <p:attrNameLst>
-                                          <p:attrName>style.visibility</p:attrName>
-                                        </p:attrNameLst>
-                                      </p:cBhvr>
-                                      <p:to>
-                                        <p:strVal val="visible"/>
-                                      </p:to>
-                                    </p:set>
-                                    <p:animEffect transition="in" filter="fade">
-                                      <p:cBhvr>
-                                        <p:cTn id="32" dur="1000"/>
-                                        <p:tgtEl>
-                                          <p:spTgt spid="9"/>
-                                        </p:tgtEl>
-                                      </p:cBhvr>
-                                    </p:animEffect>
-                                    <p:anim calcmode="lin" valueType="num">
-                                      <p:cBhvr>
-                                        <p:cTn id="33" dur="1000" fill="hold"/>
-                                        <p:tgtEl>
-                                          <p:spTgt spid="9"/>
-                                        </p:tgtEl>
-                                        <p:attrNameLst>
-                                          <p:attrName>ppt_x</p:attrName>
-                                        </p:attrNameLst>
-                                      </p:cBhvr>
-                                      <p:tavLst>
-                                        <p:tav tm="0">
-                                          <p:val>
-                                            <p:strVal val="#ppt_x"/>
-                                          </p:val>
-                                        </p:tav>
-                                        <p:tav tm="100000">
-                                          <p:val>
-                                            <p:strVal val="#ppt_x"/>
-                                          </p:val>
-                                        </p:tav>
-                                      </p:tavLst>
-                                    </p:anim>
-                                    <p:anim calcmode="lin" valueType="num">
-                                      <p:cBhvr>
-                                        <p:cTn id="34" dur="1000" fill="hold"/>
-                                        <p:tgtEl>
-                                          <p:spTgt spid="9"/>
-                                        </p:tgtEl>
-                                        <p:attrNameLst>
-                                          <p:attrName>ppt_y</p:attrName>
-                                        </p:attrNameLst>
-                                      </p:cBhvr>
-                                      <p:tavLst>
-                                        <p:tav tm="0">
-                                          <p:val>
-                                            <p:strVal val="#ppt_y+.1"/>
-                                          </p:val>
-                                        </p:tav>
-                                        <p:tav tm="100000">
-                                          <p:val>
-                                            <p:strVal val="#ppt_y"/>
-                                          </p:val>
-                                        </p:tav>
-                                      </p:tavLst>
-                                    </p:anim>
-                                  </p:childTnLst>
-                                </p:cTn>
-                              </p:par>
-                              <p:par>
-                                <p:cTn id="35" presetID="42" presetClass="entr" presetSubtype="0" fill="hold" grpId="0" nodeType="withEffect">
-                                  <p:stCondLst>
-                                    <p:cond delay="0"/>
-                                  </p:stCondLst>
-                                  <p:childTnLst>
-                                    <p:set>
-                                      <p:cBhvr>
-                                        <p:cTn id="36" dur="1" fill="hold">
-                                          <p:stCondLst>
-                                            <p:cond delay="0"/>
-                                          </p:stCondLst>
-                                        </p:cTn>
-                                        <p:tgtEl>
-                                          <p:spTgt spid="10"/>
-                                        </p:tgtEl>
-                                        <p:attrNameLst>
-                                          <p:attrName>style.visibility</p:attrName>
-                                        </p:attrNameLst>
-                                      </p:cBhvr>
-                                      <p:to>
-                                        <p:strVal val="visible"/>
-                                      </p:to>
-                                    </p:set>
-                                    <p:animEffect transition="in" filter="fade">
-                                      <p:cBhvr>
-                                        <p:cTn id="37" dur="1000"/>
-                                        <p:tgtEl>
-                                          <p:spTgt spid="10"/>
-                                        </p:tgtEl>
-                                      </p:cBhvr>
-                                    </p:animEffect>
-                                    <p:anim calcmode="lin" valueType="num">
-                                      <p:cBhvr>
-                                        <p:cTn id="38" dur="1000" fill="hold"/>
-                                        <p:tgtEl>
-                                          <p:spTgt spid="10"/>
-                                        </p:tgtEl>
-                                        <p:attrNameLst>
-                                          <p:attrName>ppt_x</p:attrName>
-                                        </p:attrNameLst>
-                                      </p:cBhvr>
-                                      <p:tavLst>
-                                        <p:tav tm="0">
-                                          <p:val>
-                                            <p:strVal val="#ppt_x"/>
-                                          </p:val>
-                                        </p:tav>
-                                        <p:tav tm="100000">
-                                          <p:val>
-                                            <p:strVal val="#ppt_x"/>
-                                          </p:val>
-                                        </p:tav>
-                                      </p:tavLst>
-                                    </p:anim>
-                                    <p:anim calcmode="lin" valueType="num">
-                                      <p:cBhvr>
-                                        <p:cTn id="39" dur="1000" fill="hold"/>
-                                        <p:tgtEl>
-                                          <p:spTgt spid="10"/>
-                                        </p:tgtEl>
-                                        <p:attrNameLst>
-                                          <p:attrName>ppt_y</p:attrName>
-                                        </p:attrNameLst>
-                                      </p:cBhvr>
-                                      <p:tavLst>
-                                        <p:tav tm="0">
-                                          <p:val>
-                                            <p:strVal val="#ppt_y+.1"/>
-                                          </p:val>
-                                        </p:tav>
-                                        <p:tav tm="100000">
-                                          <p:val>
-                                            <p:strVal val="#ppt_y"/>
-                                          </p:val>
-                                        </p:tav>
-                                      </p:tavLst>
-                                    </p:anim>
-                                  </p:childTnLst>
-                                </p:cTn>
-                              </p:par>
-                              <p:par>
-                                <p:cTn id="40" presetID="42" presetClass="entr" presetSubtype="0" fill="hold" nodeType="withEffect">
-                                  <p:stCondLst>
-                                    <p:cond delay="0"/>
-                                  </p:stCondLst>
-                                  <p:childTnLst>
-                                    <p:set>
-                                      <p:cBhvr>
-                                        <p:cTn id="41" dur="1" fill="hold">
-                                          <p:stCondLst>
-                                            <p:cond delay="0"/>
-                                          </p:stCondLst>
-                                        </p:cTn>
-                                        <p:tgtEl>
-                                          <p:spTgt spid="16"/>
-                                        </p:tgtEl>
-                                        <p:attrNameLst>
-                                          <p:attrName>style.visibility</p:attrName>
-                                        </p:attrNameLst>
-                                      </p:cBhvr>
-                                      <p:to>
-                                        <p:strVal val="visible"/>
-                                      </p:to>
-                                    </p:set>
-                                    <p:animEffect transition="in" filter="fade">
-                                      <p:cBhvr>
-                                        <p:cTn id="42" dur="1000"/>
-                                        <p:tgtEl>
-                                          <p:spTgt spid="16"/>
-                                        </p:tgtEl>
-                                      </p:cBhvr>
-                                    </p:animEffect>
-                                    <p:anim calcmode="lin" valueType="num">
-                                      <p:cBhvr>
-                                        <p:cTn id="43" dur="1000" fill="hold"/>
-                                        <p:tgtEl>
-                                          <p:spTgt spid="16"/>
-                                        </p:tgtEl>
-                                        <p:attrNameLst>
-                                          <p:attrName>ppt_x</p:attrName>
-                                        </p:attrNameLst>
-                                      </p:cBhvr>
-                                      <p:tavLst>
-                                        <p:tav tm="0">
-                                          <p:val>
-                                            <p:strVal val="#ppt_x"/>
-                                          </p:val>
-                                        </p:tav>
-                                        <p:tav tm="100000">
-                                          <p:val>
-                                            <p:strVal val="#ppt_x"/>
-                                          </p:val>
-                                        </p:tav>
-                                      </p:tavLst>
-                                    </p:anim>
-                                    <p:anim calcmode="lin" valueType="num">
-                                      <p:cBhvr>
-                                        <p:cTn id="44" dur="1000" fill="hold"/>
-                                        <p:tgtEl>
-                                          <p:spTgt spid="16"/>
-                                        </p:tgtEl>
-                                        <p:attrNameLst>
-                                          <p:attrName>ppt_y</p:attrName>
-                                        </p:attrNameLst>
-                                      </p:cBhvr>
-                                      <p:tavLst>
-                                        <p:tav tm="0">
-                                          <p:val>
-                                            <p:strVal val="#ppt_y+.1"/>
-                                          </p:val>
-                                        </p:tav>
-                                        <p:tav tm="100000">
-                                          <p:val>
-                                            <p:strVal val="#ppt_y"/>
-                                          </p:val>
-                                        </p:tav>
-                                      </p:tavLst>
-                                    </p:anim>
-                                  </p:childTnLst>
-                                </p:cTn>
-                              </p:par>
-                            </p:childTnLst>
-                          </p:cTn>
-                        </p:par>
-                      </p:childTnLst>
-                    </p:cTn>
-                  </p:par>
-                  <p:par>
-                    <p:cTn id="45" fill="hold">
-                      <p:stCondLst>
-                        <p:cond delay="indefinite"/>
-                      </p:stCondLst>
-                      <p:childTnLst>
-                        <p:par>
-                          <p:cTn id="46" fill="hold">
-                            <p:stCondLst>
-                              <p:cond delay="0"/>
-                            </p:stCondLst>
-                            <p:childTnLst>
-                              <p:par>
-                                <p:cTn id="47" presetID="42" presetClass="entr" presetSubtype="0" fill="hold" grpId="0" nodeType="clickEffect">
-                                  <p:stCondLst>
-                                    <p:cond delay="0"/>
-                                  </p:stCondLst>
-                                  <p:childTnLst>
-                                    <p:set>
-                                      <p:cBhvr>
-                                        <p:cTn id="48" dur="1" fill="hold">
-                                          <p:stCondLst>
-                                            <p:cond delay="0"/>
-                                          </p:stCondLst>
-                                        </p:cTn>
-                                        <p:tgtEl>
-                                          <p:spTgt spid="11"/>
-                                        </p:tgtEl>
-                                        <p:attrNameLst>
-                                          <p:attrName>style.visibility</p:attrName>
-                                        </p:attrNameLst>
-                                      </p:cBhvr>
-                                      <p:to>
-                                        <p:strVal val="visible"/>
-                                      </p:to>
-                                    </p:set>
-                                    <p:animEffect transition="in" filter="fade">
-                                      <p:cBhvr>
-                                        <p:cTn id="49" dur="1000"/>
-                                        <p:tgtEl>
-                                          <p:spTgt spid="11"/>
-                                        </p:tgtEl>
-                                      </p:cBhvr>
-                                    </p:animEffect>
-                                    <p:anim calcmode="lin" valueType="num">
-                                      <p:cBhvr>
-                                        <p:cTn id="50" dur="1000" fill="hold"/>
-                                        <p:tgtEl>
-                                          <p:spTgt spid="11"/>
-                                        </p:tgtEl>
-                                        <p:attrNameLst>
-                                          <p:attrName>ppt_x</p:attrName>
-                                        </p:attrNameLst>
-                                      </p:cBhvr>
-                                      <p:tavLst>
-                                        <p:tav tm="0">
-                                          <p:val>
-                                            <p:strVal val="#ppt_x"/>
-                                          </p:val>
-                                        </p:tav>
-                                        <p:tav tm="100000">
-                                          <p:val>
-                                            <p:strVal val="#ppt_x"/>
-                                          </p:val>
-                                        </p:tav>
-                                      </p:tavLst>
-                                    </p:anim>
-                                    <p:anim calcmode="lin" valueType="num">
-                                      <p:cBhvr>
-                                        <p:cTn id="51" dur="1000" fill="hold"/>
-                                        <p:tgtEl>
-                                          <p:spTgt spid="11"/>
-                                        </p:tgtEl>
-                                        <p:attrNameLst>
-                                          <p:attrName>ppt_y</p:attrName>
-                                        </p:attrNameLst>
-                                      </p:cBhvr>
-                                      <p:tavLst>
-                                        <p:tav tm="0">
-                                          <p:val>
-                                            <p:strVal val="#ppt_y+.1"/>
-                                          </p:val>
-                                        </p:tav>
-                                        <p:tav tm="100000">
-                                          <p:val>
-                                            <p:strVal val="#ppt_y"/>
-                                          </p:val>
-                                        </p:tav>
-                                      </p:tavLst>
-                                    </p:anim>
-                                  </p:childTnLst>
-                                </p:cTn>
-                              </p:par>
-                              <p:par>
-                                <p:cTn id="52" presetID="42" presetClass="entr" presetSubtype="0" fill="hold" grpId="0" nodeType="withEffect">
-                                  <p:stCondLst>
-                                    <p:cond delay="0"/>
-                                  </p:stCondLst>
-                                  <p:childTnLst>
-                                    <p:set>
-                                      <p:cBhvr>
-                                        <p:cTn id="53" dur="1" fill="hold">
-                                          <p:stCondLst>
-                                            <p:cond delay="0"/>
-                                          </p:stCondLst>
-                                        </p:cTn>
-                                        <p:tgtEl>
-                                          <p:spTgt spid="13"/>
-                                        </p:tgtEl>
-                                        <p:attrNameLst>
-                                          <p:attrName>style.visibility</p:attrName>
-                                        </p:attrNameLst>
-                                      </p:cBhvr>
-                                      <p:to>
-                                        <p:strVal val="visible"/>
-                                      </p:to>
-                                    </p:set>
-                                    <p:animEffect transition="in" filter="fade">
-                                      <p:cBhvr>
-                                        <p:cTn id="54" dur="1000"/>
-                                        <p:tgtEl>
-                                          <p:spTgt spid="13"/>
-                                        </p:tgtEl>
-                                      </p:cBhvr>
-                                    </p:animEffect>
-                                    <p:anim calcmode="lin" valueType="num">
-                                      <p:cBhvr>
-                                        <p:cTn id="55" dur="1000" fill="hold"/>
-                                        <p:tgtEl>
-                                          <p:spTgt spid="13"/>
-                                        </p:tgtEl>
-                                        <p:attrNameLst>
-                                          <p:attrName>ppt_x</p:attrName>
-                                        </p:attrNameLst>
-                                      </p:cBhvr>
-                                      <p:tavLst>
-                                        <p:tav tm="0">
-                                          <p:val>
-                                            <p:strVal val="#ppt_x"/>
-                                          </p:val>
-                                        </p:tav>
-                                        <p:tav tm="100000">
-                                          <p:val>
-                                            <p:strVal val="#ppt_x"/>
-                                          </p:val>
-                                        </p:tav>
-                                      </p:tavLst>
-                                    </p:anim>
-                                    <p:anim calcmode="lin" valueType="num">
-                                      <p:cBhvr>
-                                        <p:cTn id="56" dur="1000" fill="hold"/>
-                                        <p:tgtEl>
-                                          <p:spTgt spid="13"/>
-                                        </p:tgtEl>
-                                        <p:attrNameLst>
-                                          <p:attrName>ppt_y</p:attrName>
-                                        </p:attrNameLst>
-                                      </p:cBhvr>
-                                      <p:tavLst>
-                                        <p:tav tm="0">
-                                          <p:val>
-                                            <p:strVal val="#ppt_y+.1"/>
-                                          </p:val>
-                                        </p:tav>
-                                        <p:tav tm="100000">
-                                          <p:val>
-                                            <p:strVal val="#ppt_y"/>
-                                          </p:val>
-                                        </p:tav>
-                                      </p:tavLst>
-                                    </p:anim>
-                                  </p:childTnLst>
-                                </p:cTn>
-                              </p:par>
-                              <p:par>
-                                <p:cTn id="57" presetID="42" presetClass="entr" presetSubtype="0" fill="hold" grpId="0" nodeType="withEffect">
-                                  <p:stCondLst>
-                                    <p:cond delay="0"/>
-                                  </p:stCondLst>
-                                  <p:childTnLst>
-                                    <p:set>
-                                      <p:cBhvr>
-                                        <p:cTn id="58" dur="1" fill="hold">
-                                          <p:stCondLst>
-                                            <p:cond delay="0"/>
-                                          </p:stCondLst>
-                                        </p:cTn>
-                                        <p:tgtEl>
-                                          <p:spTgt spid="12"/>
-                                        </p:tgtEl>
-                                        <p:attrNameLst>
-                                          <p:attrName>style.visibility</p:attrName>
-                                        </p:attrNameLst>
-                                      </p:cBhvr>
-                                      <p:to>
-                                        <p:strVal val="visible"/>
-                                      </p:to>
-                                    </p:set>
-                                    <p:animEffect transition="in" filter="fade">
-                                      <p:cBhvr>
-                                        <p:cTn id="59" dur="1000"/>
-                                        <p:tgtEl>
-                                          <p:spTgt spid="12"/>
-                                        </p:tgtEl>
-                                      </p:cBhvr>
-                                    </p:animEffect>
-                                    <p:anim calcmode="lin" valueType="num">
-                                      <p:cBhvr>
-                                        <p:cTn id="60" dur="1000" fill="hold"/>
-                                        <p:tgtEl>
-                                          <p:spTgt spid="12"/>
-                                        </p:tgtEl>
-                                        <p:attrNameLst>
-                                          <p:attrName>ppt_x</p:attrName>
-                                        </p:attrNameLst>
-                                      </p:cBhvr>
-                                      <p:tavLst>
-                                        <p:tav tm="0">
-                                          <p:val>
-                                            <p:strVal val="#ppt_x"/>
-                                          </p:val>
-                                        </p:tav>
-                                        <p:tav tm="100000">
-                                          <p:val>
-                                            <p:strVal val="#ppt_x"/>
-                                          </p:val>
-                                        </p:tav>
-                                      </p:tavLst>
-                                    </p:anim>
-                                    <p:anim calcmode="lin" valueType="num">
-                                      <p:cBhvr>
-                                        <p:cTn id="61" dur="1000" fill="hold"/>
-                                        <p:tgtEl>
-                                          <p:spTgt spid="12"/>
-                                        </p:tgtEl>
-                                        <p:attrNameLst>
-                                          <p:attrName>ppt_y</p:attrName>
-                                        </p:attrNameLst>
-                                      </p:cBhvr>
-                                      <p:tavLst>
-                                        <p:tav tm="0">
-                                          <p:val>
-                                            <p:strVal val="#ppt_y+.1"/>
-                                          </p:val>
-                                        </p:tav>
-                                        <p:tav tm="100000">
-                                          <p:val>
-                                            <p:strVal val="#ppt_y"/>
-                                          </p:val>
-                                        </p:tav>
-                                      </p:tavLst>
-                                    </p:anim>
-                                  </p:childTnLst>
-                                </p:cTn>
-                              </p:par>
-                              <p:par>
-                                <p:cTn id="62" presetID="42" presetClass="entr" presetSubtype="0" fill="hold" grpId="0" nodeType="withEffect">
-                                  <p:stCondLst>
-                                    <p:cond delay="0"/>
-                                  </p:stCondLst>
-                                  <p:childTnLst>
-                                    <p:set>
-                                      <p:cBhvr>
-                                        <p:cTn id="63" dur="1" fill="hold">
-                                          <p:stCondLst>
-                                            <p:cond delay="0"/>
-                                          </p:stCondLst>
-                                        </p:cTn>
-                                        <p:tgtEl>
-                                          <p:spTgt spid="14"/>
-                                        </p:tgtEl>
-                                        <p:attrNameLst>
-                                          <p:attrName>style.visibility</p:attrName>
-                                        </p:attrNameLst>
-                                      </p:cBhvr>
-                                      <p:to>
-                                        <p:strVal val="visible"/>
-                                      </p:to>
-                                    </p:set>
-                                    <p:animEffect transition="in" filter="fade">
-                                      <p:cBhvr>
-                                        <p:cTn id="64" dur="1000"/>
-                                        <p:tgtEl>
-                                          <p:spTgt spid="14"/>
-                                        </p:tgtEl>
-                                      </p:cBhvr>
-                                    </p:animEffect>
-                                    <p:anim calcmode="lin" valueType="num">
-                                      <p:cBhvr>
-                                        <p:cTn id="65" dur="1000" fill="hold"/>
-                                        <p:tgtEl>
-                                          <p:spTgt spid="14"/>
-                                        </p:tgtEl>
-                                        <p:attrNameLst>
-                                          <p:attrName>ppt_x</p:attrName>
-                                        </p:attrNameLst>
-                                      </p:cBhvr>
-                                      <p:tavLst>
-                                        <p:tav tm="0">
-                                          <p:val>
-                                            <p:strVal val="#ppt_x"/>
-                                          </p:val>
-                                        </p:tav>
-                                        <p:tav tm="100000">
-                                          <p:val>
-                                            <p:strVal val="#ppt_x"/>
-                                          </p:val>
-                                        </p:tav>
-                                      </p:tavLst>
-                                    </p:anim>
-                                    <p:anim calcmode="lin" valueType="num">
-                                      <p:cBhvr>
-                                        <p:cTn id="66" dur="1000" fill="hold"/>
-                                        <p:tgtEl>
-                                          <p:spTgt spid="14"/>
-                                        </p:tgtEl>
-                                        <p:attrNameLst>
-                                          <p:attrName>ppt_y</p:attrName>
-                                        </p:attrNameLst>
-                                      </p:cBhvr>
-                                      <p:tavLst>
-                                        <p:tav tm="0">
-                                          <p:val>
-                                            <p:strVal val="#ppt_y+.1"/>
-                                          </p:val>
-                                        </p:tav>
-                                        <p:tav tm="100000">
-                                          <p:val>
-                                            <p:strVal val="#ppt_y"/>
-                                          </p:val>
-                                        </p:tav>
-                                      </p:tavLst>
-                                    </p:anim>
-                                  </p:childTnLst>
-                                </p:cTn>
-                              </p:par>
-                              <p:par>
-                                <p:cTn id="67" presetID="42" presetClass="entr" presetSubtype="0" fill="hold" grpId="0" nodeType="withEffect">
-                                  <p:stCondLst>
-                                    <p:cond delay="0"/>
-                                  </p:stCondLst>
-                                  <p:childTnLst>
-                                    <p:set>
-                                      <p:cBhvr>
-                                        <p:cTn id="68" dur="1" fill="hold">
-                                          <p:stCondLst>
-                                            <p:cond delay="0"/>
-                                          </p:stCondLst>
-                                        </p:cTn>
-                                        <p:tgtEl>
-                                          <p:spTgt spid="15"/>
-                                        </p:tgtEl>
-                                        <p:attrNameLst>
-                                          <p:attrName>style.visibility</p:attrName>
-                                        </p:attrNameLst>
-                                      </p:cBhvr>
-                                      <p:to>
-                                        <p:strVal val="visible"/>
-                                      </p:to>
-                                    </p:set>
-                                    <p:animEffect transition="in" filter="fade">
-                                      <p:cBhvr>
-                                        <p:cTn id="69" dur="1000"/>
-                                        <p:tgtEl>
-                                          <p:spTgt spid="15"/>
-                                        </p:tgtEl>
-                                      </p:cBhvr>
-                                    </p:animEffect>
-                                    <p:anim calcmode="lin" valueType="num">
-                                      <p:cBhvr>
-                                        <p:cTn id="70" dur="1000" fill="hold"/>
-                                        <p:tgtEl>
-                                          <p:spTgt spid="15"/>
-                                        </p:tgtEl>
-                                        <p:attrNameLst>
-                                          <p:attrName>ppt_x</p:attrName>
-                                        </p:attrNameLst>
-                                      </p:cBhvr>
-                                      <p:tavLst>
-                                        <p:tav tm="0">
-                                          <p:val>
-                                            <p:strVal val="#ppt_x"/>
-                                          </p:val>
-                                        </p:tav>
-                                        <p:tav tm="100000">
-                                          <p:val>
-                                            <p:strVal val="#ppt_x"/>
-                                          </p:val>
-                                        </p:tav>
-                                      </p:tavLst>
-                                    </p:anim>
-                                    <p:anim calcmode="lin" valueType="num">
-                                      <p:cBhvr>
-                                        <p:cTn id="71" dur="1000" fill="hold"/>
-                                        <p:tgtEl>
-                                          <p:spTgt spid="15"/>
-                                        </p:tgtEl>
-                                        <p:attrNameLst>
-                                          <p:attrName>ppt_y</p:attrName>
-                                        </p:attrNameLst>
-                                      </p:cBhvr>
-                                      <p:tavLst>
-                                        <p:tav tm="0">
-                                          <p:val>
-                                            <p:strVal val="#ppt_y+.1"/>
-                                          </p:val>
-                                        </p:tav>
-                                        <p:tav tm="100000">
-                                          <p:val>
-                                            <p:strVal val="#ppt_y"/>
-                                          </p:val>
-                                        </p:tav>
-                                      </p:tavLst>
-                                    </p:anim>
-                                  </p:childTnLst>
-                                </p:cTn>
-                              </p:par>
-                            </p:childTnLst>
-                          </p:cTn>
-                        </p:par>
-                      </p:childTnLst>
-                    </p:cTn>
-                  </p:par>
-                </p:childTnLst>
-              </p:cTn>
-              <p:prevCondLst>
-                <p:cond evt="onPrev" delay="0">
-                  <p:tgtEl>
-                    <p:sldTgt/>
-                  </p:tgtEl>
-                </p:cond>
-              </p:prevCondLst>
-              <p:nextCondLst>
-                <p:cond evt="onNext" delay="0">
-                  <p:tgtEl>
-                    <p:sldTgt/>
-                  </p:tgtEl>
-                </p:cond>
-              </p:nextCondLst>
-            </p:seq>
-          </p:childTnLst>
-        </p:cTn>
-      </p:par>
-    </p:tnLst>
-    <p:bldLst>
-      <p:bldP spid="4" grpId="0" animBg="1"/>
-      <p:bldP spid="5" grpId="0" animBg="1"/>
-      <p:bldP spid="6" grpId="0" animBg="1"/>
-      <p:bldP spid="7" grpId="0" animBg="1"/>
-      <p:bldP spid="8" grpId="0" animBg="1"/>
-      <p:bldP spid="9" grpId="0" animBg="1"/>
-      <p:bldP spid="10" grpId="0" animBg="1"/>
-      <p:bldP spid="11" grpId="0" animBg="1"/>
-      <p:bldP spid="12" grpId="0" animBg="1"/>
-      <p:bldP spid="13" grpId="0" animBg="1"/>
-      <p:bldP spid="14" grpId="0" animBg="1"/>
-      <p:bldP spid="15" grpId="0" animBg="1"/>
-    </p:bldLst>
-  </p:timing>
 </p:sld>
 </file>
 
